--- a/module-03-grid-driving/slides/04-final-project.pptx
+++ b/module-03-grid-driving/slides/04-final-project.pptx
@@ -3559,7 +3559,7 @@
               </a:defRPr>
             </a:pPr>
             <a:r>
-              <a:t>Reused LineTrack class on a grid (code reuse!)</a:t>
+              <a:t>Reused the driving toolkit on a grid (code reuse!)</a:t>
             </a:r>
           </a:p>
           <a:p>
@@ -3716,7 +3716,7 @@
               </a:defRPr>
             </a:pPr>
             <a:r>
-              <a:t>The LineTrack class continues to be used!</a:t>
+              <a:t>The driving toolkit continues to be used!</a:t>
             </a:r>
           </a:p>
           <a:p>
@@ -4209,7 +4209,7 @@
               <a:spcAft>
                 <a:spcPts val="100"/>
               </a:spcAft>
-              <a:defRPr sz="1300">
+              <a:defRPr sz="1800">
                 <a:solidFill>
                   <a:srgbClr val="333333"/>
                 </a:solidFill>
@@ -4225,7 +4225,7 @@
               <a:spcAft>
                 <a:spcPts val="100"/>
               </a:spcAft>
-              <a:defRPr sz="1300">
+              <a:defRPr sz="1800">
                 <a:solidFill>
                   <a:srgbClr val="333333"/>
                 </a:solidFill>
@@ -4241,7 +4241,7 @@
               <a:spcAft>
                 <a:spcPts val="100"/>
               </a:spcAft>
-              <a:defRPr sz="1300">
+              <a:defRPr sz="1800">
                 <a:solidFill>
                   <a:srgbClr val="333333"/>
                 </a:solidFill>
@@ -4257,7 +4257,7 @@
               <a:spcAft>
                 <a:spcPts val="100"/>
               </a:spcAft>
-              <a:defRPr sz="1300">
+              <a:defRPr sz="1800">
                 <a:solidFill>
                   <a:srgbClr val="333333"/>
                 </a:solidFill>
@@ -4273,7 +4273,7 @@
               <a:spcAft>
                 <a:spcPts val="100"/>
               </a:spcAft>
-              <a:defRPr sz="1300">
+              <a:defRPr sz="1800">
                 <a:solidFill>
                   <a:srgbClr val="333333"/>
                 </a:solidFill>
@@ -4574,7 +4574,7 @@
               <a:spcAft>
                 <a:spcPts val="100"/>
               </a:spcAft>
-              <a:defRPr sz="1300">
+              <a:defRPr sz="1800">
                 <a:solidFill>
                   <a:srgbClr val="333333"/>
                 </a:solidFill>
@@ -4590,7 +4590,7 @@
               <a:spcAft>
                 <a:spcPts val="100"/>
               </a:spcAft>
-              <a:defRPr sz="1300">
+              <a:defRPr sz="1800">
                 <a:solidFill>
                   <a:srgbClr val="333333"/>
                 </a:solidFill>
@@ -4606,7 +4606,7 @@
               <a:spcAft>
                 <a:spcPts val="100"/>
               </a:spcAft>
-              <a:defRPr sz="1300">
+              <a:defRPr sz="1800">
                 <a:solidFill>
                   <a:srgbClr val="333333"/>
                 </a:solidFill>
@@ -4619,7 +4619,7 @@
               <a:spcAft>
                 <a:spcPts val="100"/>
               </a:spcAft>
-              <a:defRPr sz="1300">
+              <a:defRPr sz="1800">
                 <a:solidFill>
                   <a:srgbClr val="333333"/>
                 </a:solidFill>
@@ -4635,7 +4635,7 @@
               <a:spcAft>
                 <a:spcPts val="100"/>
               </a:spcAft>
-              <a:defRPr sz="1300">
+              <a:defRPr sz="1800">
                 <a:solidFill>
                   <a:srgbClr val="333333"/>
                 </a:solidFill>
@@ -4651,7 +4651,7 @@
               <a:spcAft>
                 <a:spcPts val="100"/>
               </a:spcAft>
-              <a:defRPr sz="1300">
+              <a:defRPr sz="1800">
                 <a:solidFill>
                   <a:srgbClr val="333333"/>
                 </a:solidFill>
@@ -4659,7 +4659,7 @@
               </a:defRPr>
             </a:pPr>
             <a:r>
-              <a:t>    drive_intersections(tracker, 2)</a:t>
+              <a:t>    drive_intersections(2)</a:t>
             </a:r>
           </a:p>
           <a:p>
@@ -4667,7 +4667,7 @@
               <a:spcAft>
                 <a:spcPts val="100"/>
               </a:spcAft>
-              <a:defRPr sz="1300">
+              <a:defRPr sz="1800">
                 <a:solidFill>
                   <a:srgbClr val="333333"/>
                 </a:solidFill>
@@ -4675,7 +4675,7 @@
               </a:defRPr>
             </a:pPr>
             <a:r>
-              <a:t>    tracker.turn_right()</a:t>
+              <a:t>    turn_right()</a:t>
             </a:r>
           </a:p>
           <a:p>
@@ -4683,7 +4683,7 @@
               <a:spcAft>
                 <a:spcPts val="100"/>
               </a:spcAft>
-              <a:defRPr sz="1300">
+              <a:defRPr sz="1800">
                 <a:solidFill>
                   <a:srgbClr val="333333"/>
                 </a:solidFill>
@@ -4696,7 +4696,7 @@
               <a:spcAft>
                 <a:spcPts val="100"/>
               </a:spcAft>
-              <a:defRPr sz="1300">
+              <a:defRPr sz="1800">
                 <a:solidFill>
                   <a:srgbClr val="333333"/>
                 </a:solidFill>
@@ -5026,7 +5026,7 @@
                         </a:defRPr>
                       </a:pPr>
                       <a:r>
-                        <a:t>Uses LineTrack class from Module 2</a:t>
+                        <a:t>Uses the driving toolkit from Module 2</a:t>
                       </a:r>
                     </a:p>
                   </a:txBody>
@@ -5266,7 +5266,7 @@
                         </a:defRPr>
                       </a:pPr>
                       <a:r>
-                        <a:t>Total</a:t>
+                        <a:t>**Total**</a:t>
                       </a:r>
                     </a:p>
                   </a:txBody>
@@ -5283,7 +5283,7 @@
                         </a:defRPr>
                       </a:pPr>
                       <a:r>
-                        <a:t>50</a:t>
+                        <a:t>**50**</a:t>
                       </a:r>
                     </a:p>
                   </a:txBody>
@@ -5972,7 +5972,7 @@
               </a:defRPr>
             </a:pPr>
             <a:r>
-              <a:t>Try adding a small delay after turn: time.sleep(0.2)</a:t>
+              <a:t>If turns aren't lining up, check clear_intersection()'s 8 cm against your robot</a:t>
             </a:r>
           </a:p>
           <a:p>
@@ -6271,7 +6271,7 @@
               <a:spcAft>
                 <a:spcPts val="100"/>
               </a:spcAft>
-              <a:defRPr sz="1300">
+              <a:defRPr sz="1800">
                 <a:solidFill>
                   <a:srgbClr val="333333"/>
                 </a:solidFill>
@@ -6287,7 +6287,7 @@
               <a:spcAft>
                 <a:spcPts val="100"/>
               </a:spcAft>
-              <a:defRPr sz="1300">
+              <a:defRPr sz="1800">
                 <a:solidFill>
                   <a:srgbClr val="333333"/>
                 </a:solidFill>
@@ -6303,7 +6303,7 @@
               <a:spcAft>
                 <a:spcPts val="100"/>
               </a:spcAft>
-              <a:defRPr sz="1300">
+              <a:defRPr sz="1800">
                 <a:solidFill>
                   <a:srgbClr val="333333"/>
                 </a:solidFill>
@@ -6311,7 +6311,7 @@
               </a:defRPr>
             </a:pPr>
             <a:r>
-              <a:t>    drive_intersections(tracker, lengths[leg])</a:t>
+              <a:t>    drive_intersections(lengths[leg])</a:t>
             </a:r>
           </a:p>
           <a:p>
@@ -6319,7 +6319,7 @@
               <a:spcAft>
                 <a:spcPts val="100"/>
               </a:spcAft>
-              <a:defRPr sz="1300">
+              <a:defRPr sz="1800">
                 <a:solidFill>
                   <a:srgbClr val="333333"/>
                 </a:solidFill>
@@ -6327,7 +6327,7 @@
               </a:defRPr>
             </a:pPr>
             <a:r>
-              <a:t>    tracker.turn_right()</a:t>
+              <a:t>    turn_right()</a:t>
             </a:r>
           </a:p>
         </p:txBody>
@@ -6563,7 +6563,7 @@
               </a:defRPr>
             </a:pPr>
             <a:r>
-              <a:t>Copy your LineSensor and LineTrack classes</a:t>
+              <a:t>Copy your sensor and driving toolkits</a:t>
             </a:r>
           </a:p>
           <a:p>
